--- a/Pricing_Forecast_Assessment_Presentation V2.pptx
+++ b/Pricing_Forecast_Assessment_Presentation V2.pptx
@@ -934,7 +934,7 @@
           </a:lstStyle>
           <a:p>
             <a:fld id="{8E7E7B10-952C-42AF-A4A0-4F7D2A298A6F}" type="datetimeFigureOut">
-              <a:t>10/19/2026</a:t>
+              <a:t>10/20/2026</a:t>
             </a:fld>
             <a:endParaRPr lang="zh-TW" altLang="en-US"/>
           </a:p>
@@ -20240,7 +20240,7 @@
               <a:buNone/>
             </a:pPr>
             <a:r>
-              <a:rPr lang="en-US" sz="1100">
+              <a:rPr lang="en-US" sz="1100" dirty="0" err="1">
                 <a:solidFill>
                   <a:srgbClr val="2C3E50"/>
                 </a:solidFill>
@@ -20248,9 +20248,42 @@
                 <a:ea typeface="Calibri" pitchFamily="34" charset="-122"/>
                 <a:cs typeface="Calibri" pitchFamily="34" charset="-120"/>
               </a:rPr>
-              <a:t>MinMaxScaler [0,1]; stacked LSTM + Dropout</a:t>
-            </a:r>
-            <a:endParaRPr lang="en-US" sz="1100"/>
+              <a:t>MinMaxScaler</a:t>
+            </a:r>
+            <a:r>
+              <a:rPr lang="en-US" sz="1100" dirty="0">
+                <a:solidFill>
+                  <a:srgbClr val="2C3E50"/>
+                </a:solidFill>
+                <a:latin typeface="Calibri" pitchFamily="34" charset="0"/>
+                <a:ea typeface="Calibri" pitchFamily="34" charset="-122"/>
+                <a:cs typeface="Calibri" pitchFamily="34" charset="-120"/>
+              </a:rPr>
+              <a:t> [0,1]; vanilla </a:t>
+            </a:r>
+            <a:r>
+              <a:rPr lang="en-US" sz="1100" dirty="0" err="1">
+                <a:solidFill>
+                  <a:srgbClr val="2C3E50"/>
+                </a:solidFill>
+                <a:latin typeface="Calibri" pitchFamily="34" charset="0"/>
+                <a:ea typeface="Calibri" pitchFamily="34" charset="-122"/>
+                <a:cs typeface="Calibri" pitchFamily="34" charset="-120"/>
+              </a:rPr>
+              <a:t>ms</a:t>
+            </a:r>
+            <a:r>
+              <a:rPr lang="en-US" sz="1100" dirty="0">
+                <a:solidFill>
+                  <a:srgbClr val="2C3E50"/>
+                </a:solidFill>
+                <a:latin typeface="Calibri" pitchFamily="34" charset="0"/>
+                <a:ea typeface="Calibri" pitchFamily="34" charset="-122"/>
+                <a:cs typeface="Calibri" pitchFamily="34" charset="-120"/>
+              </a:rPr>
+              <a:t> / stacked LSTM + Dropout</a:t>
+            </a:r>
+            <a:endParaRPr lang="en-US" sz="1100" dirty="0"/>
           </a:p>
         </p:txBody>
       </p:sp>
@@ -21317,7 +21350,7 @@
               <a:buNone/>
             </a:pPr>
             <a:r>
-              <a:rPr lang="en-US" sz="1200">
+              <a:rPr lang="en-US" sz="1200" dirty="0">
                 <a:solidFill>
                   <a:srgbClr val="2C3E50"/>
                 </a:solidFill>
@@ -21325,16 +21358,16 @@
                 <a:ea typeface="Calibri" pitchFamily="34" charset="-122"/>
                 <a:cs typeface="Calibri" pitchFamily="34" charset="-120"/>
               </a:rPr>
-              <a:t>• Stacked LSTM + Dropout</a:t>
-            </a:r>
-            <a:endParaRPr lang="en-US" sz="1200"/>
-          </a:p>
-          <a:p>
-            <a:pPr marL="0" indent="0">
-              <a:buNone/>
-            </a:pPr>
-            <a:r>
-              <a:rPr lang="en-US" sz="1200">
+              <a:t>• Vanilla MS / Stacked LSTM + Dropout</a:t>
+            </a:r>
+            <a:endParaRPr lang="en-US" sz="1200" dirty="0"/>
+          </a:p>
+          <a:p>
+            <a:pPr marL="0" indent="0">
+              <a:buNone/>
+            </a:pPr>
+            <a:r>
+              <a:rPr lang="en-US" sz="1200" dirty="0">
                 <a:solidFill>
                   <a:srgbClr val="2C3E50"/>
                 </a:solidFill>
@@ -21344,14 +21377,14 @@
               </a:rPr>
               <a:t>• Dense output, Adam, MSE</a:t>
             </a:r>
-            <a:endParaRPr lang="en-US" sz="1200"/>
-          </a:p>
-          <a:p>
-            <a:pPr marL="0" indent="0">
-              <a:buNone/>
-            </a:pPr>
-            <a:r>
-              <a:rPr lang="en-US" sz="1200">
+            <a:endParaRPr lang="en-US" sz="1200" dirty="0"/>
+          </a:p>
+          <a:p>
+            <a:pPr marL="0" indent="0">
+              <a:buNone/>
+            </a:pPr>
+            <a:r>
+              <a:rPr lang="en-US" sz="1200" dirty="0">
                 <a:solidFill>
                   <a:srgbClr val="2C3E50"/>
                 </a:solidFill>
@@ -21361,7 +21394,7 @@
               </a:rPr>
               <a:t>• Chronological split</a:t>
             </a:r>
-            <a:endParaRPr lang="en-US" sz="1200"/>
+            <a:endParaRPr lang="en-US" sz="1200" dirty="0"/>
           </a:p>
         </p:txBody>
       </p:sp>

--- a/Pricing_Forecast_Assessment_Presentation V2.pptx
+++ b/Pricing_Forecast_Assessment_Presentation V2.pptx
@@ -135,722 +135,11 @@
 <file path=ppt/revisionInfo.xml><?xml version="1.0" encoding="utf-8"?>
 <p1510:revInfo xmlns:a="http://schemas.openxmlformats.org/drawingml/2006/main" xmlns:r="http://schemas.openxmlformats.org/officeDocument/2006/relationships" xmlns:p1510="http://schemas.microsoft.com/office/powerpoint/2015/10/main">
   <p1510:revLst>
+    <p1510:client id="{18468F0A-6794-8AB7-D5F8-B09E2AB90DE7}" v="13" dt="2026-10-20T10:13:44.356"/>
     <p1510:client id="{78A2A23C-AEC6-C86E-BE98-5A427936BB95}" v="59" dt="2026-10-20T03:13:27.767"/>
     <p1510:client id="{D1CCD778-5869-251E-AA73-806A07F76F88}" v="24" dt="2026-10-20T04:07:16.359"/>
   </p1510:revLst>
 </p1510:revInfo>
-</file>
-
-<file path=ppt/changesInfos/changesInfo1.xml><?xml version="1.0" encoding="utf-8"?>
-<pc:chgInfo xmlns:a="http://schemas.openxmlformats.org/drawingml/2006/main" xmlns:r="http://schemas.openxmlformats.org/officeDocument/2006/relationships" xmlns:ac="http://schemas.microsoft.com/office/drawing/2013/main/command" xmlns:pc="http://schemas.microsoft.com/office/powerpoint/2013/main/command">
-  <pc:docChgLst>
-    <pc:chgData name="來賓使用者" providerId="Windows Live" clId="Web-{47F2AA4E-CABF-B6DB-FEDA-8367C57FA855}"/>
-    <pc:docChg chg="addSld delSld modSld sldOrd">
-      <pc:chgData name="來賓使用者" userId="" providerId="Windows Live" clId="Web-{47F2AA4E-CABF-B6DB-FEDA-8367C57FA855}" dt="2026-10-14T03:39:23.678" v="144" actId="14100"/>
-      <pc:docMkLst>
-        <pc:docMk/>
-      </pc:docMkLst>
-      <pc:sldChg chg="modSp">
-        <pc:chgData name="來賓使用者" userId="" providerId="Windows Live" clId="Web-{47F2AA4E-CABF-B6DB-FEDA-8367C57FA855}" dt="2026-10-14T01:55:59.390" v="15" actId="20577"/>
-        <pc:sldMkLst>
-          <pc:docMk/>
-          <pc:sldMk cId="0" sldId="260"/>
-        </pc:sldMkLst>
-        <pc:spChg chg="mod">
-          <ac:chgData name="來賓使用者" userId="" providerId="Windows Live" clId="Web-{47F2AA4E-CABF-B6DB-FEDA-8367C57FA855}" dt="2026-10-14T01:55:59.390" v="15" actId="20577"/>
-          <ac:spMkLst>
-            <pc:docMk/>
-            <pc:sldMk cId="0" sldId="260"/>
-            <ac:spMk id="22" creationId="{00000000-0000-0000-0000-000000000000}"/>
-          </ac:spMkLst>
-        </pc:spChg>
-      </pc:sldChg>
-      <pc:sldChg chg="modSp">
-        <pc:chgData name="來賓使用者" userId="" providerId="Windows Live" clId="Web-{47F2AA4E-CABF-B6DB-FEDA-8367C57FA855}" dt="2026-10-14T03:01:25.156" v="47" actId="20577"/>
-        <pc:sldMkLst>
-          <pc:docMk/>
-          <pc:sldMk cId="0" sldId="261"/>
-        </pc:sldMkLst>
-        <pc:spChg chg="mod">
-          <ac:chgData name="來賓使用者" userId="" providerId="Windows Live" clId="Web-{47F2AA4E-CABF-B6DB-FEDA-8367C57FA855}" dt="2026-10-14T03:00:40.764" v="26" actId="20577"/>
-          <ac:spMkLst>
-            <pc:docMk/>
-            <pc:sldMk cId="0" sldId="261"/>
-            <ac:spMk id="17" creationId="{00000000-0000-0000-0000-000000000000}"/>
-          </ac:spMkLst>
-        </pc:spChg>
-        <pc:spChg chg="mod">
-          <ac:chgData name="來賓使用者" userId="" providerId="Windows Live" clId="Web-{47F2AA4E-CABF-B6DB-FEDA-8367C57FA855}" dt="2026-10-14T03:01:25.156" v="47" actId="20577"/>
-          <ac:spMkLst>
-            <pc:docMk/>
-            <pc:sldMk cId="0" sldId="261"/>
-            <ac:spMk id="23" creationId="{00000000-0000-0000-0000-000000000000}"/>
-          </ac:spMkLst>
-        </pc:spChg>
-      </pc:sldChg>
-      <pc:sldChg chg="modSp">
-        <pc:chgData name="來賓使用者" userId="" providerId="Windows Live" clId="Web-{47F2AA4E-CABF-B6DB-FEDA-8367C57FA855}" dt="2026-10-14T03:20:22.261" v="70" actId="20577"/>
-        <pc:sldMkLst>
-          <pc:docMk/>
-          <pc:sldMk cId="0" sldId="262"/>
-        </pc:sldMkLst>
-        <pc:spChg chg="mod">
-          <ac:chgData name="來賓使用者" userId="" providerId="Windows Live" clId="Web-{47F2AA4E-CABF-B6DB-FEDA-8367C57FA855}" dt="2026-10-14T03:01:46.641" v="68" actId="20577"/>
-          <ac:spMkLst>
-            <pc:docMk/>
-            <pc:sldMk cId="0" sldId="262"/>
-            <ac:spMk id="10" creationId="{00000000-0000-0000-0000-000000000000}"/>
-          </ac:spMkLst>
-        </pc:spChg>
-        <pc:spChg chg="mod">
-          <ac:chgData name="來賓使用者" userId="" providerId="Windows Live" clId="Web-{47F2AA4E-CABF-B6DB-FEDA-8367C57FA855}" dt="2026-10-14T01:58:49.444" v="22" actId="20577"/>
-          <ac:spMkLst>
-            <pc:docMk/>
-            <pc:sldMk cId="0" sldId="262"/>
-            <ac:spMk id="23" creationId="{00000000-0000-0000-0000-000000000000}"/>
-          </ac:spMkLst>
-        </pc:spChg>
-      </pc:sldChg>
-      <pc:sldChg chg="addSp modSp">
-        <pc:chgData name="來賓使用者" userId="" providerId="Windows Live" clId="Web-{47F2AA4E-CABF-B6DB-FEDA-8367C57FA855}" dt="2026-10-14T03:33:01.039" v="76" actId="14100"/>
-        <pc:sldMkLst>
-          <pc:docMk/>
-          <pc:sldMk cId="0" sldId="266"/>
-        </pc:sldMkLst>
-      </pc:sldChg>
-      <pc:sldChg chg="modSp add ord replId">
-        <pc:chgData name="來賓使用者" userId="" providerId="Windows Live" clId="Web-{47F2AA4E-CABF-B6DB-FEDA-8367C57FA855}" dt="2026-10-14T03:34:29.339" v="83"/>
-        <pc:sldMkLst>
-          <pc:docMk/>
-          <pc:sldMk cId="3524207548" sldId="271"/>
-        </pc:sldMkLst>
-        <pc:spChg chg="mod">
-          <ac:chgData name="來賓使用者" userId="" providerId="Windows Live" clId="Web-{47F2AA4E-CABF-B6DB-FEDA-8367C57FA855}" dt="2026-10-14T03:34:17.854" v="82" actId="20577"/>
-          <ac:spMkLst>
-            <pc:docMk/>
-            <pc:sldMk cId="3524207548" sldId="271"/>
-            <ac:spMk id="3" creationId="{8233C106-44D6-BCB3-9557-666D8ECCCF5B}"/>
-          </ac:spMkLst>
-        </pc:spChg>
-      </pc:sldChg>
-      <pc:sldChg chg="addSp delSp modSp">
-        <pc:chgData name="來賓使用者" userId="" providerId="Windows Live" clId="Web-{47F2AA4E-CABF-B6DB-FEDA-8367C57FA855}" dt="2026-10-14T03:39:23.678" v="144" actId="14100"/>
-        <pc:sldMkLst>
-          <pc:docMk/>
-          <pc:sldMk cId="2580809980" sldId="273"/>
-        </pc:sldMkLst>
-        <pc:spChg chg="mod">
-          <ac:chgData name="來賓使用者" userId="" providerId="Windows Live" clId="Web-{47F2AA4E-CABF-B6DB-FEDA-8367C57FA855}" dt="2026-10-14T03:36:22.703" v="120" actId="20577"/>
-          <ac:spMkLst>
-            <pc:docMk/>
-            <pc:sldMk cId="2580809980" sldId="273"/>
-            <ac:spMk id="3" creationId="{88B5E7EB-5A46-F15B-FEB5-0ECDC9D12ED6}"/>
-          </ac:spMkLst>
-        </pc:spChg>
-        <pc:spChg chg="add mod">
-          <ac:chgData name="來賓使用者" userId="" providerId="Windows Live" clId="Web-{47F2AA4E-CABF-B6DB-FEDA-8367C57FA855}" dt="2026-10-14T03:39:23.678" v="144" actId="14100"/>
-          <ac:spMkLst>
-            <pc:docMk/>
-            <pc:sldMk cId="2580809980" sldId="273"/>
-            <ac:spMk id="10" creationId="{F404CFA2-D922-8940-DE21-0A542E39DF41}"/>
-          </ac:spMkLst>
-        </pc:spChg>
-      </pc:sldChg>
-    </pc:docChg>
-  </pc:docChgLst>
-  <pc:docChgLst>
-    <pc:chgData name="Guest User" providerId="Windows Live" clId="Web-{7D14901B-77EE-D7A8-36F9-9870022297F3}"/>
-    <pc:docChg chg="modSld">
-      <pc:chgData name="Guest User" userId="" providerId="Windows Live" clId="Web-{7D14901B-77EE-D7A8-36F9-9870022297F3}" dt="2026-10-14T08:00:42.264" v="14" actId="1076"/>
-      <pc:docMkLst>
-        <pc:docMk/>
-      </pc:docMkLst>
-      <pc:sldChg chg="addSp modSp">
-        <pc:chgData name="Guest User" userId="" providerId="Windows Live" clId="Web-{7D14901B-77EE-D7A8-36F9-9870022297F3}" dt="2026-10-14T07:59:43.169" v="8" actId="14100"/>
-        <pc:sldMkLst>
-          <pc:docMk/>
-          <pc:sldMk cId="0" sldId="267"/>
-        </pc:sldMkLst>
-        <pc:picChg chg="add mod">
-          <ac:chgData name="Guest User" userId="" providerId="Windows Live" clId="Web-{7D14901B-77EE-D7A8-36F9-9870022297F3}" dt="2026-10-14T07:59:43.169" v="8" actId="14100"/>
-          <ac:picMkLst>
-            <pc:docMk/>
-            <pc:sldMk cId="0" sldId="267"/>
-            <ac:picMk id="91" creationId="{FF9C41EA-2E52-2203-BDCE-F49133415E5D}"/>
-          </ac:picMkLst>
-        </pc:picChg>
-      </pc:sldChg>
-      <pc:sldChg chg="addSp modSp">
-        <pc:chgData name="Guest User" userId="" providerId="Windows Live" clId="Web-{7D14901B-77EE-D7A8-36F9-9870022297F3}" dt="2026-10-14T08:00:42.264" v="14" actId="1076"/>
-        <pc:sldMkLst>
-          <pc:docMk/>
-          <pc:sldMk cId="2124060169" sldId="275"/>
-        </pc:sldMkLst>
-        <pc:picChg chg="add mod">
-          <ac:chgData name="Guest User" userId="" providerId="Windows Live" clId="Web-{7D14901B-77EE-D7A8-36F9-9870022297F3}" dt="2026-10-14T08:00:42.264" v="14" actId="1076"/>
-          <ac:picMkLst>
-            <pc:docMk/>
-            <pc:sldMk cId="2124060169" sldId="275"/>
-            <ac:picMk id="7" creationId="{6A45FE0B-F6A3-5E01-30D4-6533AC1CCD2E}"/>
-          </ac:picMkLst>
-        </pc:picChg>
-      </pc:sldChg>
-    </pc:docChg>
-  </pc:docChgLst>
-  <pc:docChgLst>
-    <pc:chgData name="Y Y" userId="50132bf925faa04d" providerId="Windows Live" clId="Web-{00000000-0000-0000-0000-000000000000}"/>
-    <pc:docChg chg="modSld">
-      <pc:chgData name="Y Y" userId="50132bf925faa04d" providerId="Windows Live" clId="Web-{00000000-0000-0000-0000-000000000000}" dt="2026-10-14T04:22:11.266" v="159" actId="1076"/>
-      <pc:docMkLst>
-        <pc:docMk/>
-      </pc:docMkLst>
-      <pc:sldChg chg="addSp delSp modSp">
-        <pc:chgData name="Y Y" userId="50132bf925faa04d" providerId="Windows Live" clId="Web-{00000000-0000-0000-0000-000000000000}" dt="2026-10-14T04:22:11.266" v="159" actId="1076"/>
-        <pc:sldMkLst>
-          <pc:docMk/>
-          <pc:sldMk cId="0" sldId="266"/>
-        </pc:sldMkLst>
-        <pc:spChg chg="mod">
-          <ac:chgData name="Y Y" userId="50132bf925faa04d" providerId="Windows Live" clId="Web-{00000000-0000-0000-0000-000000000000}" dt="2026-10-14T04:22:00.688" v="156" actId="1076"/>
-          <ac:spMkLst>
-            <pc:docMk/>
-            <pc:sldMk cId="0" sldId="266"/>
-            <ac:spMk id="6" creationId="{00000000-0000-0000-0000-000000000000}"/>
-          </ac:spMkLst>
-        </pc:spChg>
-        <pc:spChg chg="add mod">
-          <ac:chgData name="Y Y" userId="50132bf925faa04d" providerId="Windows Live" clId="Web-{00000000-0000-0000-0000-000000000000}" dt="2026-10-14T03:37:15.062" v="25" actId="20577"/>
-          <ac:spMkLst>
-            <pc:docMk/>
-            <pc:sldMk cId="0" sldId="266"/>
-            <ac:spMk id="67" creationId="{E32E4D98-ED05-598C-7E9F-CDF5B7BB9EB0}"/>
-          </ac:spMkLst>
-        </pc:spChg>
-      </pc:sldChg>
-    </pc:docChg>
-  </pc:docChgLst>
-  <pc:docChgLst>
-    <pc:chgData name="來賓使用者" providerId="Windows Live" clId="Web-{D1CCD778-5869-251E-AA73-806A07F76F88}"/>
-    <pc:docChg chg="modSld">
-      <pc:chgData name="來賓使用者" userId="" providerId="Windows Live" clId="Web-{D1CCD778-5869-251E-AA73-806A07F76F88}" dt="2026-10-20T04:07:16.359" v="23" actId="20577"/>
-      <pc:docMkLst>
-        <pc:docMk/>
-      </pc:docMkLst>
-      <pc:sldChg chg="modSp">
-        <pc:chgData name="來賓使用者" userId="" providerId="Windows Live" clId="Web-{D1CCD778-5869-251E-AA73-806A07F76F88}" dt="2026-10-20T03:39:24.625" v="4" actId="1076"/>
-        <pc:sldMkLst>
-          <pc:docMk/>
-          <pc:sldMk cId="0" sldId="258"/>
-        </pc:sldMkLst>
-        <pc:spChg chg="mod">
-          <ac:chgData name="來賓使用者" userId="" providerId="Windows Live" clId="Web-{D1CCD778-5869-251E-AA73-806A07F76F88}" dt="2026-10-20T03:39:13.296" v="3" actId="1076"/>
-          <ac:spMkLst>
-            <pc:docMk/>
-            <pc:sldMk cId="0" sldId="258"/>
-            <ac:spMk id="14" creationId="{00000000-0000-0000-0000-000000000000}"/>
-          </ac:spMkLst>
-        </pc:spChg>
-        <pc:spChg chg="mod">
-          <ac:chgData name="來賓使用者" userId="" providerId="Windows Live" clId="Web-{D1CCD778-5869-251E-AA73-806A07F76F88}" dt="2026-10-20T03:39:24.625" v="4" actId="1076"/>
-          <ac:spMkLst>
-            <pc:docMk/>
-            <pc:sldMk cId="0" sldId="258"/>
-            <ac:spMk id="18" creationId="{00000000-0000-0000-0000-000000000000}"/>
-          </ac:spMkLst>
-        </pc:spChg>
-      </pc:sldChg>
-      <pc:sldChg chg="modSp">
-        <pc:chgData name="來賓使用者" userId="" providerId="Windows Live" clId="Web-{D1CCD778-5869-251E-AA73-806A07F76F88}" dt="2026-10-20T04:07:16.359" v="23" actId="20577"/>
-        <pc:sldMkLst>
-          <pc:docMk/>
-          <pc:sldMk cId="0" sldId="259"/>
-        </pc:sldMkLst>
-        <pc:spChg chg="mod">
-          <ac:chgData name="來賓使用者" userId="" providerId="Windows Live" clId="Web-{D1CCD778-5869-251E-AA73-806A07F76F88}" dt="2026-10-20T04:06:16.562" v="18"/>
-          <ac:spMkLst>
-            <pc:docMk/>
-            <pc:sldMk cId="0" sldId="259"/>
-            <ac:spMk id="18" creationId="{00000000-0000-0000-0000-000000000000}"/>
-          </ac:spMkLst>
-        </pc:spChg>
-        <pc:spChg chg="mod">
-          <ac:chgData name="來賓使用者" userId="" providerId="Windows Live" clId="Web-{D1CCD778-5869-251E-AA73-806A07F76F88}" dt="2026-10-20T04:05:38.015" v="8" actId="20577"/>
-          <ac:spMkLst>
-            <pc:docMk/>
-            <pc:sldMk cId="0" sldId="259"/>
-            <ac:spMk id="19" creationId="{00000000-0000-0000-0000-000000000000}"/>
-          </ac:spMkLst>
-        </pc:spChg>
-        <pc:spChg chg="mod">
-          <ac:chgData name="來賓使用者" userId="" providerId="Windows Live" clId="Web-{D1CCD778-5869-251E-AA73-806A07F76F88}" dt="2026-10-20T04:07:16.359" v="23" actId="20577"/>
-          <ac:spMkLst>
-            <pc:docMk/>
-            <pc:sldMk cId="0" sldId="259"/>
-            <ac:spMk id="24" creationId="{00000000-0000-0000-0000-000000000000}"/>
-          </ac:spMkLst>
-        </pc:spChg>
-      </pc:sldChg>
-    </pc:docChg>
-  </pc:docChgLst>
-  <pc:docChgLst>
-    <pc:chgData name="Zhun Log, Ryan PONG" userId="9b1c450da3d4918e" providerId="Windows Live" clId="Web-{200C91C0-FFD4-62BC-0AAF-9FB8B5F9A736}"/>
-    <pc:docChg chg="addSld delSld modSld">
-      <pc:chgData name="Zhun Log, Ryan PONG" userId="9b1c450da3d4918e" providerId="Windows Live" clId="Web-{200C91C0-FFD4-62BC-0AAF-9FB8B5F9A736}" dt="2026-10-15T04:43:47.070" v="12"/>
-      <pc:docMkLst>
-        <pc:docMk/>
-      </pc:docMkLst>
-      <pc:sldChg chg="mod modShow">
-        <pc:chgData name="Zhun Log, Ryan PONG" userId="9b1c450da3d4918e" providerId="Windows Live" clId="Web-{200C91C0-FFD4-62BC-0AAF-9FB8B5F9A736}" dt="2026-10-15T04:42:56.285" v="10"/>
-        <pc:sldMkLst>
-          <pc:docMk/>
-          <pc:sldMk cId="0" sldId="265"/>
-        </pc:sldMkLst>
-      </pc:sldChg>
-      <pc:sldChg chg="add replId">
-        <pc:chgData name="Zhun Log, Ryan PONG" userId="9b1c450da3d4918e" providerId="Windows Live" clId="Web-{200C91C0-FFD4-62BC-0AAF-9FB8B5F9A736}" dt="2026-10-15T04:41:38.593" v="0"/>
-        <pc:sldMkLst>
-          <pc:docMk/>
-          <pc:sldMk cId="1925540428" sldId="278"/>
-        </pc:sldMkLst>
-      </pc:sldChg>
-    </pc:docChg>
-  </pc:docChgLst>
-  <pc:docChgLst>
-    <pc:chgData name="Zhun Log, Ryan PONG" userId="9b1c450da3d4918e" providerId="Windows Live" clId="Web-{D6CFC487-5B0C-B748-F2C1-FE5A511483C8}"/>
-    <pc:docChg chg="addSld modSld">
-      <pc:chgData name="Zhun Log, Ryan PONG" userId="9b1c450da3d4918e" providerId="Windows Live" clId="Web-{D6CFC487-5B0C-B748-F2C1-FE5A511483C8}" dt="2026-10-14T04:25:25.046" v="110" actId="1076"/>
-      <pc:docMkLst>
-        <pc:docMk/>
-      </pc:docMkLst>
-      <pc:sldChg chg="addSp delSp modSp">
-        <pc:chgData name="Zhun Log, Ryan PONG" userId="9b1c450da3d4918e" providerId="Windows Live" clId="Web-{D6CFC487-5B0C-B748-F2C1-FE5A511483C8}" dt="2026-10-14T04:20:56.117" v="13" actId="14100"/>
-        <pc:sldMkLst>
-          <pc:docMk/>
-          <pc:sldMk cId="0" sldId="267"/>
-        </pc:sldMkLst>
-        <pc:picChg chg="add mod">
-          <ac:chgData name="Zhun Log, Ryan PONG" userId="9b1c450da3d4918e" providerId="Windows Live" clId="Web-{D6CFC487-5B0C-B748-F2C1-FE5A511483C8}" dt="2026-10-14T04:20:21.631" v="8" actId="14100"/>
-          <ac:picMkLst>
-            <pc:docMk/>
-            <pc:sldMk cId="0" sldId="267"/>
-            <ac:picMk id="93" creationId="{340CBB6C-88DC-E077-6CD8-8D8F747A3A74}"/>
-          </ac:picMkLst>
-        </pc:picChg>
-        <pc:picChg chg="add mod">
-          <ac:chgData name="Zhun Log, Ryan PONG" userId="9b1c450da3d4918e" providerId="Windows Live" clId="Web-{D6CFC487-5B0C-B748-F2C1-FE5A511483C8}" dt="2026-10-14T04:20:56.117" v="13" actId="14100"/>
-          <ac:picMkLst>
-            <pc:docMk/>
-            <pc:sldMk cId="0" sldId="267"/>
-            <ac:picMk id="94" creationId="{1298B086-FBD4-FAFE-23F1-CF23FB13BBBB}"/>
-          </ac:picMkLst>
-        </pc:picChg>
-      </pc:sldChg>
-      <pc:sldChg chg="modSp">
-        <pc:chgData name="Zhun Log, Ryan PONG" userId="9b1c450da3d4918e" providerId="Windows Live" clId="Web-{D6CFC487-5B0C-B748-F2C1-FE5A511483C8}" dt="2026-10-14T04:21:35.118" v="35" actId="20577"/>
-        <pc:sldMkLst>
-          <pc:docMk/>
-          <pc:sldMk cId="3524207548" sldId="271"/>
-        </pc:sldMkLst>
-        <pc:spChg chg="mod">
-          <ac:chgData name="Zhun Log, Ryan PONG" userId="9b1c450da3d4918e" providerId="Windows Live" clId="Web-{D6CFC487-5B0C-B748-F2C1-FE5A511483C8}" dt="2026-10-14T04:21:35.118" v="35" actId="20577"/>
-          <ac:spMkLst>
-            <pc:docMk/>
-            <pc:sldMk cId="3524207548" sldId="271"/>
-            <ac:spMk id="3" creationId="{8233C106-44D6-BCB3-9557-666D8ECCCF5B}"/>
-          </ac:spMkLst>
-        </pc:spChg>
-      </pc:sldChg>
-      <pc:sldChg chg="modSp">
-        <pc:chgData name="Zhun Log, Ryan PONG" userId="9b1c450da3d4918e" providerId="Windows Live" clId="Web-{D6CFC487-5B0C-B748-F2C1-FE5A511483C8}" dt="2026-10-14T04:21:40.227" v="37" actId="20577"/>
-        <pc:sldMkLst>
-          <pc:docMk/>
-          <pc:sldMk cId="3285808356" sldId="274"/>
-        </pc:sldMkLst>
-        <pc:spChg chg="mod">
-          <ac:chgData name="Zhun Log, Ryan PONG" userId="9b1c450da3d4918e" providerId="Windows Live" clId="Web-{D6CFC487-5B0C-B748-F2C1-FE5A511483C8}" dt="2026-10-14T04:21:40.227" v="37" actId="20577"/>
-          <ac:spMkLst>
-            <pc:docMk/>
-            <pc:sldMk cId="3285808356" sldId="274"/>
-            <ac:spMk id="3" creationId="{DF55AA97-7C02-82AA-E1E0-3C86FA183494}"/>
-          </ac:spMkLst>
-        </pc:spChg>
-      </pc:sldChg>
-      <pc:sldChg chg="modSp">
-        <pc:chgData name="Zhun Log, Ryan PONG" userId="9b1c450da3d4918e" providerId="Windows Live" clId="Web-{D6CFC487-5B0C-B748-F2C1-FE5A511483C8}" dt="2026-10-14T04:23:04.198" v="77" actId="20577"/>
-        <pc:sldMkLst>
-          <pc:docMk/>
-          <pc:sldMk cId="2124060169" sldId="275"/>
-        </pc:sldMkLst>
-        <pc:spChg chg="mod">
-          <ac:chgData name="Zhun Log, Ryan PONG" userId="9b1c450da3d4918e" providerId="Windows Live" clId="Web-{D6CFC487-5B0C-B748-F2C1-FE5A511483C8}" dt="2026-10-14T04:23:04.198" v="77" actId="20577"/>
-          <ac:spMkLst>
-            <pc:docMk/>
-            <pc:sldMk cId="2124060169" sldId="275"/>
-            <ac:spMk id="3" creationId="{66F21313-1986-FC73-5A99-320892F29ABA}"/>
-          </ac:spMkLst>
-        </pc:spChg>
-      </pc:sldChg>
-      <pc:sldChg chg="addSp modSp add replId">
-        <pc:chgData name="Zhun Log, Ryan PONG" userId="9b1c450da3d4918e" providerId="Windows Live" clId="Web-{D6CFC487-5B0C-B748-F2C1-FE5A511483C8}" dt="2026-10-14T04:24:26.560" v="102" actId="1076"/>
-        <pc:sldMkLst>
-          <pc:docMk/>
-          <pc:sldMk cId="3112914964" sldId="276"/>
-        </pc:sldMkLst>
-        <pc:spChg chg="mod">
-          <ac:chgData name="Zhun Log, Ryan PONG" userId="9b1c450da3d4918e" providerId="Windows Live" clId="Web-{D6CFC487-5B0C-B748-F2C1-FE5A511483C8}" dt="2026-10-14T04:22:18.119" v="61" actId="20577"/>
-          <ac:spMkLst>
-            <pc:docMk/>
-            <pc:sldMk cId="3112914964" sldId="276"/>
-            <ac:spMk id="3" creationId="{D828A961-E34A-28F6-A2D4-ADEE7DC564BF}"/>
-          </ac:spMkLst>
-        </pc:spChg>
-        <pc:picChg chg="add mod">
-          <ac:chgData name="Zhun Log, Ryan PONG" userId="9b1c450da3d4918e" providerId="Windows Live" clId="Web-{D6CFC487-5B0C-B748-F2C1-FE5A511483C8}" dt="2026-10-14T04:24:26.560" v="102" actId="1076"/>
-          <ac:picMkLst>
-            <pc:docMk/>
-            <pc:sldMk cId="3112914964" sldId="276"/>
-            <ac:picMk id="7" creationId="{C47A2155-554D-E4F1-667D-C4A37FDB07CF}"/>
-          </ac:picMkLst>
-        </pc:picChg>
-      </pc:sldChg>
-      <pc:sldChg chg="addSp modSp add replId">
-        <pc:chgData name="Zhun Log, Ryan PONG" userId="9b1c450da3d4918e" providerId="Windows Live" clId="Web-{D6CFC487-5B0C-B748-F2C1-FE5A511483C8}" dt="2026-10-14T04:25:25.046" v="110" actId="1076"/>
-        <pc:sldMkLst>
-          <pc:docMk/>
-          <pc:sldMk cId="168032558" sldId="277"/>
-        </pc:sldMkLst>
-        <pc:spChg chg="mod">
-          <ac:chgData name="Zhun Log, Ryan PONG" userId="9b1c450da3d4918e" providerId="Windows Live" clId="Web-{D6CFC487-5B0C-B748-F2C1-FE5A511483C8}" dt="2026-10-14T04:23:26.652" v="98" actId="20577"/>
-          <ac:spMkLst>
-            <pc:docMk/>
-            <pc:sldMk cId="168032558" sldId="277"/>
-            <ac:spMk id="3" creationId="{A66C056C-98AB-33DF-589A-6963B8064E3E}"/>
-          </ac:spMkLst>
-        </pc:spChg>
-        <pc:picChg chg="add mod">
-          <ac:chgData name="Zhun Log, Ryan PONG" userId="9b1c450da3d4918e" providerId="Windows Live" clId="Web-{D6CFC487-5B0C-B748-F2C1-FE5A511483C8}" dt="2026-10-14T04:25:25.046" v="110" actId="1076"/>
-          <ac:picMkLst>
-            <pc:docMk/>
-            <pc:sldMk cId="168032558" sldId="277"/>
-            <ac:picMk id="7" creationId="{290C553F-D61A-89FE-5C0D-0F958642891A}"/>
-          </ac:picMkLst>
-        </pc:picChg>
-      </pc:sldChg>
-    </pc:docChg>
-  </pc:docChgLst>
-  <pc:docChgLst>
-    <pc:chgData name="來賓使用者" providerId="Windows Live" clId="Web-{7530DC1E-B829-E4EE-B787-0E450E1DCF18}"/>
-    <pc:docChg chg="addSld delSld modSld">
-      <pc:chgData name="來賓使用者" userId="" providerId="Windows Live" clId="Web-{7530DC1E-B829-E4EE-B787-0E450E1DCF18}" dt="2026-10-14T12:13:19.477" v="281" actId="20577"/>
-      <pc:docMkLst>
-        <pc:docMk/>
-      </pc:docMkLst>
-      <pc:sldChg chg="modSp">
-        <pc:chgData name="來賓使用者" userId="" providerId="Windows Live" clId="Web-{7530DC1E-B829-E4EE-B787-0E450E1DCF18}" dt="2026-10-14T12:13:19.477" v="281" actId="20577"/>
-        <pc:sldMkLst>
-          <pc:docMk/>
-          <pc:sldMk cId="0" sldId="256"/>
-        </pc:sldMkLst>
-        <pc:spChg chg="mod">
-          <ac:chgData name="來賓使用者" userId="" providerId="Windows Live" clId="Web-{7530DC1E-B829-E4EE-B787-0E450E1DCF18}" dt="2026-10-14T12:13:19.477" v="281" actId="20577"/>
-          <ac:spMkLst>
-            <pc:docMk/>
-            <pc:sldMk cId="0" sldId="256"/>
-            <ac:spMk id="6" creationId="{00000000-0000-0000-0000-000000000000}"/>
-          </ac:spMkLst>
-        </pc:spChg>
-        <pc:spChg chg="mod">
-          <ac:chgData name="來賓使用者" userId="" providerId="Windows Live" clId="Web-{7530DC1E-B829-E4EE-B787-0E450E1DCF18}" dt="2026-10-14T12:12:49.539" v="276" actId="20577"/>
-          <ac:spMkLst>
-            <pc:docMk/>
-            <pc:sldMk cId="0" sldId="256"/>
-            <ac:spMk id="7" creationId="{00000000-0000-0000-0000-000000000000}"/>
-          </ac:spMkLst>
-        </pc:spChg>
-      </pc:sldChg>
-      <pc:sldChg chg="addSp delSp modSp">
-        <pc:chgData name="來賓使用者" userId="" providerId="Windows Live" clId="Web-{7530DC1E-B829-E4EE-B787-0E450E1DCF18}" dt="2026-10-14T12:12:01.149" v="275" actId="14100"/>
-        <pc:sldMkLst>
-          <pc:docMk/>
-          <pc:sldMk cId="0" sldId="266"/>
-        </pc:sldMkLst>
-        <pc:picChg chg="add mod">
-          <ac:chgData name="來賓使用者" userId="" providerId="Windows Live" clId="Web-{7530DC1E-B829-E4EE-B787-0E450E1DCF18}" dt="2026-10-14T12:11:51.555" v="272" actId="1076"/>
-          <ac:picMkLst>
-            <pc:docMk/>
-            <pc:sldMk cId="0" sldId="266"/>
-            <ac:picMk id="71" creationId="{31BDF6F1-A284-2009-A3E5-DFE64C146A4F}"/>
-          </ac:picMkLst>
-        </pc:picChg>
-        <pc:picChg chg="mod">
-          <ac:chgData name="來賓使用者" userId="" providerId="Windows Live" clId="Web-{7530DC1E-B829-E4EE-B787-0E450E1DCF18}" dt="2026-10-14T12:12:01.149" v="275" actId="14100"/>
-          <ac:picMkLst>
-            <pc:docMk/>
-            <pc:sldMk cId="0" sldId="266"/>
-            <ac:picMk id="77" creationId="{30D63D47-29BF-74BF-52AC-E968C322D2C6}"/>
-          </ac:picMkLst>
-        </pc:picChg>
-      </pc:sldChg>
-      <pc:sldChg chg="addSp delSp modSp">
-        <pc:chgData name="來賓使用者" userId="" providerId="Windows Live" clId="Web-{7530DC1E-B829-E4EE-B787-0E450E1DCF18}" dt="2026-10-14T12:10:20.570" v="251"/>
-        <pc:sldMkLst>
-          <pc:docMk/>
-          <pc:sldMk cId="3524207548" sldId="271"/>
-        </pc:sldMkLst>
-        <pc:spChg chg="mod">
-          <ac:chgData name="來賓使用者" userId="" providerId="Windows Live" clId="Web-{7530DC1E-B829-E4EE-B787-0E450E1DCF18}" dt="2026-10-14T12:02:39.022" v="136" actId="1076"/>
-          <ac:spMkLst>
-            <pc:docMk/>
-            <pc:sldMk cId="3524207548" sldId="271"/>
-            <ac:spMk id="6" creationId="{E04E7212-1202-C00C-3575-8B7FFF8DAA82}"/>
-          </ac:spMkLst>
-        </pc:spChg>
-        <pc:spChg chg="add mod">
-          <ac:chgData name="來賓使用者" userId="" providerId="Windows Live" clId="Web-{7530DC1E-B829-E4EE-B787-0E450E1DCF18}" dt="2026-10-14T12:09:05.898" v="240" actId="1076"/>
-          <ac:spMkLst>
-            <pc:docMk/>
-            <pc:sldMk cId="3524207548" sldId="271"/>
-            <ac:spMk id="10" creationId="{B23F76E6-CCCC-0239-3531-8A58566804C7}"/>
-          </ac:spMkLst>
-        </pc:spChg>
-        <pc:spChg chg="add mod">
-          <ac:chgData name="來賓使用者" userId="" providerId="Windows Live" clId="Web-{7530DC1E-B829-E4EE-B787-0E450E1DCF18}" dt="2026-10-14T12:09:23.351" v="243" actId="14100"/>
-          <ac:spMkLst>
-            <pc:docMk/>
-            <pc:sldMk cId="3524207548" sldId="271"/>
-            <ac:spMk id="11" creationId="{3AA5BD6B-5109-2A5A-45B9-987265EA8C23}"/>
-          </ac:spMkLst>
-        </pc:spChg>
-        <pc:spChg chg="add mod">
-          <ac:chgData name="來賓使用者" userId="" providerId="Windows Live" clId="Web-{7530DC1E-B829-E4EE-B787-0E450E1DCF18}" dt="2026-10-14T12:10:20.570" v="251"/>
-          <ac:spMkLst>
-            <pc:docMk/>
-            <pc:sldMk cId="3524207548" sldId="271"/>
-            <ac:spMk id="12" creationId="{36952404-EC23-D97C-FA98-4A6F8A1B86FD}"/>
-          </ac:spMkLst>
-        </pc:spChg>
-        <pc:grpChg chg="add">
-          <ac:chgData name="來賓使用者" userId="" providerId="Windows Live" clId="Web-{7530DC1E-B829-E4EE-B787-0E450E1DCF18}" dt="2026-10-14T12:09:35.930" v="244"/>
-          <ac:grpSpMkLst>
-            <pc:docMk/>
-            <pc:sldMk cId="3524207548" sldId="271"/>
-            <ac:grpSpMk id="16" creationId="{25315331-B89C-23BD-9CB2-4C490816E165}"/>
-          </ac:grpSpMkLst>
-        </pc:grpChg>
-        <pc:picChg chg="add mod ord">
-          <ac:chgData name="來賓使用者" userId="" providerId="Windows Live" clId="Web-{7530DC1E-B829-E4EE-B787-0E450E1DCF18}" dt="2026-10-14T12:06:41.788" v="177"/>
-          <ac:picMkLst>
-            <pc:docMk/>
-            <pc:sldMk cId="3524207548" sldId="271"/>
-            <ac:picMk id="15" creationId="{82C37D70-595E-9A39-13BC-A431F4085E03}"/>
-          </ac:picMkLst>
-        </pc:picChg>
-      </pc:sldChg>
-    </pc:docChg>
-  </pc:docChgLst>
-  <pc:docChgLst>
-    <pc:chgData name="Zhun Log, Ryan PONG" userId="9b1c450da3d4918e" providerId="Windows Live" clId="Web-{00000000-0000-0000-0000-000000000000}"/>
-    <pc:docChg chg="addSld delSld modSld sldOrd">
-      <pc:chgData name="Zhun Log, Ryan PONG" userId="9b1c450da3d4918e" providerId="Windows Live" clId="Web-{00000000-0000-0000-0000-000000000000}" dt="2026-10-14T04:30:11.797" v="179"/>
-      <pc:docMkLst>
-        <pc:docMk/>
-      </pc:docMkLst>
-      <pc:sldChg chg="delSp modSp">
-        <pc:chgData name="Zhun Log, Ryan PONG" userId="9b1c450da3d4918e" providerId="Windows Live" clId="Web-{00000000-0000-0000-0000-000000000000}" dt="2026-10-14T04:26:51.322" v="165"/>
-        <pc:sldMkLst>
-          <pc:docMk/>
-          <pc:sldMk cId="0" sldId="257"/>
-        </pc:sldMkLst>
-      </pc:sldChg>
-      <pc:sldChg chg="addSp delSp modSp">
-        <pc:chgData name="Zhun Log, Ryan PONG" userId="9b1c450da3d4918e" providerId="Windows Live" clId="Web-{00000000-0000-0000-0000-000000000000}" dt="2026-10-14T04:09:02.770" v="157" actId="1076"/>
-        <pc:sldMkLst>
-          <pc:docMk/>
-          <pc:sldMk cId="0" sldId="266"/>
-        </pc:sldMkLst>
-        <pc:spChg chg="mod">
-          <ac:chgData name="Zhun Log, Ryan PONG" userId="9b1c450da3d4918e" providerId="Windows Live" clId="Web-{00000000-0000-0000-0000-000000000000}" dt="2026-10-14T03:52:56.765" v="57" actId="14100"/>
-          <ac:spMkLst>
-            <pc:docMk/>
-            <pc:sldMk cId="0" sldId="266"/>
-            <ac:spMk id="67" creationId="{E32E4D98-ED05-598C-7E9F-CDF5B7BB9EB0}"/>
-          </ac:spMkLst>
-        </pc:spChg>
-        <pc:spChg chg="add mod">
-          <ac:chgData name="Zhun Log, Ryan PONG" userId="9b1c450da3d4918e" providerId="Windows Live" clId="Web-{00000000-0000-0000-0000-000000000000}" dt="2026-10-14T03:53:36.408" v="82" actId="1076"/>
-          <ac:spMkLst>
-            <pc:docMk/>
-            <pc:sldMk cId="0" sldId="266"/>
-            <ac:spMk id="75" creationId="{34AC61A6-FBC6-D624-DCAB-2FBB3D741CFC}"/>
-          </ac:spMkLst>
-        </pc:spChg>
-        <pc:picChg chg="add mod">
-          <ac:chgData name="Zhun Log, Ryan PONG" userId="9b1c450da3d4918e" providerId="Windows Live" clId="Web-{00000000-0000-0000-0000-000000000000}" dt="2026-10-14T04:09:02.770" v="157" actId="1076"/>
-          <ac:picMkLst>
-            <pc:docMk/>
-            <pc:sldMk cId="0" sldId="266"/>
-            <ac:picMk id="77" creationId="{30D63D47-29BF-74BF-52AC-E968C322D2C6}"/>
-          </ac:picMkLst>
-        </pc:picChg>
-      </pc:sldChg>
-      <pc:sldChg chg="addSp delSp modSp mod modShow">
-        <pc:chgData name="Zhun Log, Ryan PONG" userId="9b1c450da3d4918e" providerId="Windows Live" clId="Web-{00000000-0000-0000-0000-000000000000}" dt="2026-10-14T04:30:11.797" v="179"/>
-        <pc:sldMkLst>
-          <pc:docMk/>
-          <pc:sldMk cId="0" sldId="267"/>
-        </pc:sldMkLst>
-        <pc:picChg chg="mod">
-          <ac:chgData name="Zhun Log, Ryan PONG" userId="9b1c450da3d4918e" providerId="Windows Live" clId="Web-{00000000-0000-0000-0000-000000000000}" dt="2026-10-14T04:29:15.483" v="174" actId="1076"/>
-          <ac:picMkLst>
-            <pc:docMk/>
-            <pc:sldMk cId="0" sldId="267"/>
-            <ac:picMk id="93" creationId="{340CBB6C-88DC-E077-6CD8-8D8F747A3A74}"/>
-          </ac:picMkLst>
-        </pc:picChg>
-      </pc:sldChg>
-      <pc:sldChg chg="delSp modSp">
-        <pc:chgData name="Zhun Log, Ryan PONG" userId="9b1c450da3d4918e" providerId="Windows Live" clId="Web-{00000000-0000-0000-0000-000000000000}" dt="2026-10-14T03:35:31.754" v="30" actId="20577"/>
-        <pc:sldMkLst>
-          <pc:docMk/>
-          <pc:sldMk cId="3524207548" sldId="271"/>
-        </pc:sldMkLst>
-        <pc:spChg chg="mod">
-          <ac:chgData name="Zhun Log, Ryan PONG" userId="9b1c450da3d4918e" providerId="Windows Live" clId="Web-{00000000-0000-0000-0000-000000000000}" dt="2026-10-14T03:35:31.754" v="30" actId="20577"/>
-          <ac:spMkLst>
-            <pc:docMk/>
-            <pc:sldMk cId="3524207548" sldId="271"/>
-            <ac:spMk id="3" creationId="{8233C106-44D6-BCB3-9557-666D8ECCCF5B}"/>
-          </ac:spMkLst>
-        </pc:spChg>
-      </pc:sldChg>
-      <pc:sldChg chg="add replId">
-        <pc:chgData name="Zhun Log, Ryan PONG" userId="9b1c450da3d4918e" providerId="Windows Live" clId="Web-{00000000-0000-0000-0000-000000000000}" dt="2026-10-14T03:35:36.801" v="31"/>
-        <pc:sldMkLst>
-          <pc:docMk/>
-          <pc:sldMk cId="2580809980" sldId="273"/>
-        </pc:sldMkLst>
-      </pc:sldChg>
-      <pc:sldChg chg="addSp delSp modSp add ord replId">
-        <pc:chgData name="Zhun Log, Ryan PONG" userId="9b1c450da3d4918e" providerId="Windows Live" clId="Web-{00000000-0000-0000-0000-000000000000}" dt="2026-10-14T04:07:40.842" v="148" actId="1076"/>
-        <pc:sldMkLst>
-          <pc:docMk/>
-          <pc:sldMk cId="3285808356" sldId="274"/>
-        </pc:sldMkLst>
-        <pc:spChg chg="mod">
-          <ac:chgData name="Zhun Log, Ryan PONG" userId="9b1c450da3d4918e" providerId="Windows Live" clId="Web-{00000000-0000-0000-0000-000000000000}" dt="2026-10-14T03:56:15.341" v="121" actId="20577"/>
-          <ac:spMkLst>
-            <pc:docMk/>
-            <pc:sldMk cId="3285808356" sldId="274"/>
-            <ac:spMk id="3" creationId="{DF55AA97-7C02-82AA-E1E0-3C86FA183494}"/>
-          </ac:spMkLst>
-        </pc:spChg>
-        <pc:picChg chg="add mod">
-          <ac:chgData name="Zhun Log, Ryan PONG" userId="9b1c450da3d4918e" providerId="Windows Live" clId="Web-{00000000-0000-0000-0000-000000000000}" dt="2026-10-14T04:07:40.842" v="148" actId="1076"/>
-          <ac:picMkLst>
-            <pc:docMk/>
-            <pc:sldMk cId="3285808356" sldId="274"/>
-            <ac:picMk id="13" creationId="{407064A3-ABE4-BC43-F85F-69CFFE6FA982}"/>
-          </ac:picMkLst>
-        </pc:picChg>
-      </pc:sldChg>
-      <pc:sldChg chg="add replId">
-        <pc:chgData name="Zhun Log, Ryan PONG" userId="9b1c450da3d4918e" providerId="Windows Live" clId="Web-{00000000-0000-0000-0000-000000000000}" dt="2026-10-14T03:35:40.192" v="33"/>
-        <pc:sldMkLst>
-          <pc:docMk/>
-          <pc:sldMk cId="2124060169" sldId="275"/>
-        </pc:sldMkLst>
-      </pc:sldChg>
-    </pc:docChg>
-  </pc:docChgLst>
-  <pc:docChgLst>
-    <pc:chgData name="Zhun Log, Ryan PONG" userId="9b1c450da3d4918e" providerId="Windows Live" clId="Web-{FDBEFA26-BB86-DB6F-1472-54E4625676EF}"/>
-    <pc:docChg chg="modSld">
-      <pc:chgData name="Zhun Log, Ryan PONG" userId="9b1c450da3d4918e" providerId="Windows Live" clId="Web-{FDBEFA26-BB86-DB6F-1472-54E4625676EF}" dt="2026-10-14T03:16:52.247" v="28" actId="20577"/>
-      <pc:docMkLst>
-        <pc:docMk/>
-      </pc:docMkLst>
-      <pc:sldChg chg="modSp">
-        <pc:chgData name="Zhun Log, Ryan PONG" userId="9b1c450da3d4918e" providerId="Windows Live" clId="Web-{FDBEFA26-BB86-DB6F-1472-54E4625676EF}" dt="2026-10-14T03:16:52.247" v="28" actId="20577"/>
-        <pc:sldMkLst>
-          <pc:docMk/>
-          <pc:sldMk cId="0" sldId="262"/>
-        </pc:sldMkLst>
-        <pc:spChg chg="mod">
-          <ac:chgData name="Zhun Log, Ryan PONG" userId="9b1c450da3d4918e" providerId="Windows Live" clId="Web-{FDBEFA26-BB86-DB6F-1472-54E4625676EF}" dt="2026-10-14T03:16:52.247" v="28" actId="20577"/>
-          <ac:spMkLst>
-            <pc:docMk/>
-            <pc:sldMk cId="0" sldId="262"/>
-            <ac:spMk id="29" creationId="{00000000-0000-0000-0000-000000000000}"/>
-          </ac:spMkLst>
-        </pc:spChg>
-      </pc:sldChg>
-    </pc:docChg>
-  </pc:docChgLst>
-  <pc:docChgLst>
-    <pc:chgData name="Guest User" providerId="Windows Live" clId="Web-{0C20F704-4D9B-6EE2-4FDB-AFCA7C57AC4E}"/>
-    <pc:docChg chg="delSld modSld">
-      <pc:chgData name="Guest User" userId="" providerId="Windows Live" clId="Web-{0C20F704-4D9B-6EE2-4FDB-AFCA7C57AC4E}" dt="2026-10-15T03:29:12.833" v="8"/>
-      <pc:docMkLst>
-        <pc:docMk/>
-      </pc:docMkLst>
-      <pc:sldChg chg="delSp modSp">
-        <pc:chgData name="Guest User" userId="" providerId="Windows Live" clId="Web-{0C20F704-4D9B-6EE2-4FDB-AFCA7C57AC4E}" dt="2026-10-15T03:28:34.270" v="7" actId="1076"/>
-        <pc:sldMkLst>
-          <pc:docMk/>
-          <pc:sldMk cId="0" sldId="262"/>
-        </pc:sldMkLst>
-        <pc:spChg chg="mod">
-          <ac:chgData name="Guest User" userId="" providerId="Windows Live" clId="Web-{0C20F704-4D9B-6EE2-4FDB-AFCA7C57AC4E}" dt="2026-10-15T03:28:34.223" v="5" actId="1076"/>
-          <ac:spMkLst>
-            <pc:docMk/>
-            <pc:sldMk cId="0" sldId="262"/>
-            <ac:spMk id="17" creationId="{00000000-0000-0000-0000-000000000000}"/>
-          </ac:spMkLst>
-        </pc:spChg>
-        <pc:spChg chg="mod">
-          <ac:chgData name="Guest User" userId="" providerId="Windows Live" clId="Web-{0C20F704-4D9B-6EE2-4FDB-AFCA7C57AC4E}" dt="2026-10-15T03:28:34.254" v="6" actId="1076"/>
-          <ac:spMkLst>
-            <pc:docMk/>
-            <pc:sldMk cId="0" sldId="262"/>
-            <ac:spMk id="18" creationId="{00000000-0000-0000-0000-000000000000}"/>
-          </ac:spMkLst>
-        </pc:spChg>
-        <pc:spChg chg="mod">
-          <ac:chgData name="Guest User" userId="" providerId="Windows Live" clId="Web-{0C20F704-4D9B-6EE2-4FDB-AFCA7C57AC4E}" dt="2026-10-15T03:28:34.270" v="7" actId="1076"/>
-          <ac:spMkLst>
-            <pc:docMk/>
-            <pc:sldMk cId="0" sldId="262"/>
-            <ac:spMk id="19" creationId="{00000000-0000-0000-0000-000000000000}"/>
-          </ac:spMkLst>
-        </pc:spChg>
-      </pc:sldChg>
-    </pc:docChg>
-  </pc:docChgLst>
-  <pc:docChgLst>
-    <pc:chgData name="Zhun Log, Ryan PONG" userId="9b1c450da3d4918e" providerId="Windows Live" clId="Web-{78A2A23C-AEC6-C86E-BE98-5A427936BB95}"/>
-    <pc:docChg chg="modSld">
-      <pc:chgData name="Zhun Log, Ryan PONG" userId="9b1c450da3d4918e" providerId="Windows Live" clId="Web-{78A2A23C-AEC6-C86E-BE98-5A427936BB95}" dt="2026-10-20T03:13:27.767" v="56" actId="20577"/>
-      <pc:docMkLst>
-        <pc:docMk/>
-      </pc:docMkLst>
-      <pc:sldChg chg="modSp">
-        <pc:chgData name="Zhun Log, Ryan PONG" userId="9b1c450da3d4918e" providerId="Windows Live" clId="Web-{78A2A23C-AEC6-C86E-BE98-5A427936BB95}" dt="2026-10-20T03:13:27.767" v="56" actId="20577"/>
-        <pc:sldMkLst>
-          <pc:docMk/>
-          <pc:sldMk cId="0" sldId="263"/>
-        </pc:sldMkLst>
-        <pc:spChg chg="mod">
-          <ac:chgData name="Zhun Log, Ryan PONG" userId="9b1c450da3d4918e" providerId="Windows Live" clId="Web-{78A2A23C-AEC6-C86E-BE98-5A427936BB95}" dt="2026-10-20T03:13:27.767" v="56" actId="20577"/>
-          <ac:spMkLst>
-            <pc:docMk/>
-            <pc:sldMk cId="0" sldId="263"/>
-            <ac:spMk id="21" creationId="{00000000-0000-0000-0000-000000000000}"/>
-          </ac:spMkLst>
-        </pc:spChg>
-      </pc:sldChg>
-    </pc:docChg>
-  </pc:docChgLst>
-</pc:chgInfo>
 </file>
 
 <file path=ppt/notesMasters/notesMaster1.xml><?xml version="1.0" encoding="utf-8"?>
@@ -934,7 +223,7 @@
           </a:lstStyle>
           <a:p>
             <a:fld id="{8E7E7B10-952C-42AF-A4A0-4F7D2A298A6F}" type="datetimeFigureOut">
-              <a:t>10/20/2026</a:t>
+              <a:t>2026/10/20</a:t>
             </a:fld>
             <a:endParaRPr lang="zh-TW" altLang="en-US"/>
           </a:p>
@@ -21125,7 +20414,7 @@
                 <a:ea typeface="Calibri"/>
                 <a:cs typeface="Calibri"/>
               </a:rPr>
-              <a:t>: 3/5/7,</a:t>
+              <a:t>: 3/4/5,</a:t>
             </a:r>
             <a:endParaRPr lang="en-US" sz="1200" dirty="0">
               <a:solidFill>
